--- a/reports/WashGo_presentation.pptx
+++ b/reports/WashGo_presentation.pptx
@@ -2257,7 +2257,7 @@
                 <a:ea typeface="Aptos"/>
                 <a:cs typeface="Aptos"/>
               </a:rPr>
-              <a:t>Бровко Никита | анализ конкурентов и географии размещения</a:t>
+              <a:t>анализ конкурентов и географии размещения</a:t>
             </a:r>
           </a:p>
         </p:txBody>
